--- a/slides/16_decision_making.pptx
+++ b/slides/16_decision_making.pptx
@@ -2420,7 +2420,7 @@
           <a:p>
             <a:fld id="{CDFB1A35-FCF7-4D0C-AE83-400D24256912}" type="datetimeFigureOut">
               <a:rPr lang="en-US" smtClean="0"/>
-              <a:t>12/16/2025</a:t>
+              <a:t>4/20/2026</a:t>
             </a:fld>
             <a:endParaRPr lang="en-US"/>
           </a:p>
@@ -3659,7 +3659,7 @@
           <a:p>
             <a:fld id="{16A8CD98-EF2C-4EFD-A320-0FD1E700AB34}" type="datetimeFigureOut">
               <a:rPr lang="en-US" smtClean="0"/>
-              <a:t>12/16/2025</a:t>
+              <a:t>4/20/2026</a:t>
             </a:fld>
             <a:endParaRPr lang="en-US"/>
           </a:p>
@@ -3857,7 +3857,7 @@
           <a:p>
             <a:fld id="{16A8CD98-EF2C-4EFD-A320-0FD1E700AB34}" type="datetimeFigureOut">
               <a:rPr lang="en-US" smtClean="0"/>
-              <a:t>12/16/2025</a:t>
+              <a:t>4/20/2026</a:t>
             </a:fld>
             <a:endParaRPr lang="en-US"/>
           </a:p>
@@ -4065,7 +4065,7 @@
           <a:p>
             <a:fld id="{16A8CD98-EF2C-4EFD-A320-0FD1E700AB34}" type="datetimeFigureOut">
               <a:rPr lang="en-US" smtClean="0"/>
-              <a:t>12/16/2025</a:t>
+              <a:t>4/20/2026</a:t>
             </a:fld>
             <a:endParaRPr lang="en-US"/>
           </a:p>
@@ -4263,7 +4263,7 @@
           <a:p>
             <a:fld id="{16A8CD98-EF2C-4EFD-A320-0FD1E700AB34}" type="datetimeFigureOut">
               <a:rPr lang="en-US" smtClean="0"/>
-              <a:t>12/16/2025</a:t>
+              <a:t>4/20/2026</a:t>
             </a:fld>
             <a:endParaRPr lang="en-US"/>
           </a:p>
@@ -4538,7 +4538,7 @@
           <a:p>
             <a:fld id="{16A8CD98-EF2C-4EFD-A320-0FD1E700AB34}" type="datetimeFigureOut">
               <a:rPr lang="en-US" smtClean="0"/>
-              <a:t>12/16/2025</a:t>
+              <a:t>4/20/2026</a:t>
             </a:fld>
             <a:endParaRPr lang="en-US"/>
           </a:p>
@@ -4803,7 +4803,7 @@
           <a:p>
             <a:fld id="{16A8CD98-EF2C-4EFD-A320-0FD1E700AB34}" type="datetimeFigureOut">
               <a:rPr lang="en-US" smtClean="0"/>
-              <a:t>12/16/2025</a:t>
+              <a:t>4/20/2026</a:t>
             </a:fld>
             <a:endParaRPr lang="en-US"/>
           </a:p>
@@ -5215,7 +5215,7 @@
           <a:p>
             <a:fld id="{16A8CD98-EF2C-4EFD-A320-0FD1E700AB34}" type="datetimeFigureOut">
               <a:rPr lang="en-US" smtClean="0"/>
-              <a:t>12/16/2025</a:t>
+              <a:t>4/20/2026</a:t>
             </a:fld>
             <a:endParaRPr lang="en-US"/>
           </a:p>
@@ -5356,7 +5356,7 @@
           <a:p>
             <a:fld id="{16A8CD98-EF2C-4EFD-A320-0FD1E700AB34}" type="datetimeFigureOut">
               <a:rPr lang="en-US" smtClean="0"/>
-              <a:t>12/16/2025</a:t>
+              <a:t>4/20/2026</a:t>
             </a:fld>
             <a:endParaRPr lang="en-US"/>
           </a:p>
@@ -5469,7 +5469,7 @@
           <a:p>
             <a:fld id="{16A8CD98-EF2C-4EFD-A320-0FD1E700AB34}" type="datetimeFigureOut">
               <a:rPr lang="en-US" smtClean="0"/>
-              <a:t>12/16/2025</a:t>
+              <a:t>4/20/2026</a:t>
             </a:fld>
             <a:endParaRPr lang="en-US"/>
           </a:p>
@@ -5780,7 +5780,7 @@
           <a:p>
             <a:fld id="{16A8CD98-EF2C-4EFD-A320-0FD1E700AB34}" type="datetimeFigureOut">
               <a:rPr lang="en-US" smtClean="0"/>
-              <a:t>12/16/2025</a:t>
+              <a:t>4/20/2026</a:t>
             </a:fld>
             <a:endParaRPr lang="en-US"/>
           </a:p>
@@ -6068,7 +6068,7 @@
           <a:p>
             <a:fld id="{16A8CD98-EF2C-4EFD-A320-0FD1E700AB34}" type="datetimeFigureOut">
               <a:rPr lang="en-US" smtClean="0"/>
-              <a:t>12/16/2025</a:t>
+              <a:t>4/20/2026</a:t>
             </a:fld>
             <a:endParaRPr lang="en-US"/>
           </a:p>
@@ -6309,7 +6309,7 @@
           <a:p>
             <a:fld id="{16A8CD98-EF2C-4EFD-A320-0FD1E700AB34}" type="datetimeFigureOut">
               <a:rPr lang="en-US" smtClean="0"/>
-              <a:t>12/16/2025</a:t>
+              <a:t>4/20/2026</a:t>
             </a:fld>
             <a:endParaRPr lang="en-US"/>
           </a:p>
@@ -18766,8 +18766,8 @@
           </p:sp>
         </mc:Fallback>
       </mc:AlternateContent>
-      <mc:AlternateContent xmlns:mc="http://schemas.openxmlformats.org/markup-compatibility/2006">
-        <mc:Choice xmlns:a14="http://schemas.microsoft.com/office/drawing/2010/main" Requires="a14">
+      <mc:AlternateContent xmlns:mc="http://schemas.openxmlformats.org/markup-compatibility/2006" xmlns:a14="http://schemas.microsoft.com/office/drawing/2010/main">
+        <mc:Choice Requires="a14">
           <p:sp>
             <p:nvSpPr>
               <p:cNvPr id="9" name="Text Box 62">
@@ -19167,7 +19167,7 @@
             </p:txBody>
           </p:sp>
         </mc:Choice>
-        <mc:Fallback>
+        <mc:Fallback xmlns="">
           <p:sp>
             <p:nvSpPr>
               <p:cNvPr id="9" name="Text Box 62">
@@ -24462,8 +24462,8 @@
           <a:lstStyle/>
           <a:p>
             <a:r>
-              <a:rPr lang="en-US" sz="3600"/>
-              <a:t>Conclusion</a:t>
+              <a:rPr lang="en-US" sz="3600" dirty="0"/>
+              <a:t>What You Should Know</a:t>
             </a:r>
           </a:p>
         </p:txBody>
@@ -24830,13 +24830,13 @@
               <a:avLst/>
             </a:prstGeom>
             <a:blipFill>
-              <a:blip r:embed="rId2">
+              <a:blip>
                 <a:extLst>
                   <a:ext uri="{28A0092B-C50C-407E-A947-70E740481C1C}">
                     <a14:useLocalDpi xmlns:a14="http://schemas.microsoft.com/office/drawing/2010/main" val="0"/>
                   </a:ext>
                   <a:ext uri="{96DAC541-7B7A-43D3-8B79-37D633B846F1}">
-                    <asvg:svgBlip xmlns:asvg="http://schemas.microsoft.com/office/drawing/2016/SVG/main" r:embed="rId3"/>
+                    <asvg:svgBlip xmlns:asvg="http://schemas.microsoft.com/office/drawing/2016/SVG/main" r:embed="rId2"/>
                   </a:ext>
                 </a:extLst>
               </a:blip>
@@ -25010,33 +25010,65 @@
               <a:buNone/>
             </a:pPr>
             <a:r>
-              <a:rPr lang="en-US" sz="1600" kern="1200" dirty="0"/>
+              <a:rPr lang="en-US" sz="1600" kern="1200" dirty="0">
+                <a:solidFill>
+                  <a:schemeClr val="tx1"/>
+                </a:solidFill>
+              </a:rPr>
               <a:t>Decision networks are an extension of Bayesian networks that </a:t>
             </a:r>
             <a:r>
-              <a:rPr lang="en-US" sz="1600" b="1" kern="1200" dirty="0"/>
+              <a:rPr lang="en-US" sz="1600" b="1" kern="1200" dirty="0">
+                <a:solidFill>
+                  <a:schemeClr val="tx1"/>
+                </a:solidFill>
+              </a:rPr>
               <a:t>add actions and utility </a:t>
             </a:r>
             <a:r>
-              <a:rPr lang="en-US" sz="1600" kern="1200" dirty="0"/>
+              <a:rPr lang="en-US" sz="1600" kern="1200" dirty="0">
+                <a:solidFill>
+                  <a:schemeClr val="tx1"/>
+                </a:solidFill>
+              </a:rPr>
               <a:t>to compactly specify the joint probability.</a:t>
             </a:r>
             <a:br>
-              <a:rPr lang="en-US" sz="1600" kern="1200" dirty="0"/>
+              <a:rPr lang="en-US" sz="1600" kern="1200" dirty="0">
+                <a:solidFill>
+                  <a:schemeClr val="tx1"/>
+                </a:solidFill>
+              </a:rPr>
             </a:br>
             <a:br>
-              <a:rPr lang="en-US" sz="1600" kern="1200" dirty="0"/>
+              <a:rPr lang="en-US" sz="1600" kern="1200" dirty="0">
+                <a:solidFill>
+                  <a:schemeClr val="tx1"/>
+                </a:solidFill>
+              </a:rPr>
             </a:br>
             <a:r>
-              <a:rPr lang="en-US" sz="1600" kern="1200" dirty="0"/>
+              <a:rPr lang="en-US" sz="1600" kern="1200" dirty="0">
+                <a:solidFill>
+                  <a:schemeClr val="tx1"/>
+                </a:solidFill>
+              </a:rPr>
               <a:t>The network is used to </a:t>
             </a:r>
             <a:r>
-              <a:rPr lang="en-US" sz="1600" b="1" kern="1200" dirty="0"/>
+              <a:rPr lang="en-US" sz="1600" b="1" kern="1200" dirty="0">
+                <a:solidFill>
+                  <a:schemeClr val="tx1"/>
+                </a:solidFill>
+              </a:rPr>
               <a:t>calculate the expected utility of actions</a:t>
             </a:r>
             <a:r>
-              <a:rPr lang="en-US" sz="1600" kern="1200" dirty="0"/>
+              <a:rPr lang="en-US" sz="1600" kern="1200" dirty="0">
+                <a:solidFill>
+                  <a:schemeClr val="tx1"/>
+                </a:solidFill>
+              </a:rPr>
               <a:t>.</a:t>
             </a:r>
           </a:p>
@@ -25140,10 +25172,10 @@
               <a:avLst/>
             </a:prstGeom>
             <a:blipFill>
-              <a:blip r:embed="rId4">
+              <a:blip>
                 <a:extLst>
                   <a:ext uri="{96DAC541-7B7A-43D3-8B79-37D633B846F1}">
-                    <asvg:svgBlip xmlns:asvg="http://schemas.microsoft.com/office/drawing/2016/SVG/main" r:embed="rId5"/>
+                    <asvg:svgBlip xmlns:asvg="http://schemas.microsoft.com/office/drawing/2016/SVG/main" r:embed="rId3"/>
                   </a:ext>
                 </a:extLst>
               </a:blip>
@@ -25317,15 +25349,27 @@
               <a:buNone/>
             </a:pPr>
             <a:r>
-              <a:rPr lang="en-US" sz="1600" kern="1200" dirty="0"/>
+              <a:rPr lang="en-US" sz="1600" kern="1200" dirty="0">
+                <a:solidFill>
+                  <a:schemeClr val="tx1"/>
+                </a:solidFill>
+              </a:rPr>
               <a:t>Decision networks can be used to make simple repeated  decisions in a </a:t>
             </a:r>
             <a:r>
-              <a:rPr lang="en-US" sz="1600" b="1" kern="1200" dirty="0"/>
+              <a:rPr lang="en-US" sz="1600" b="1" kern="1200" dirty="0">
+                <a:solidFill>
+                  <a:schemeClr val="tx1"/>
+                </a:solidFill>
+              </a:rPr>
               <a:t>stochastic, partially observable, and episodic environment</a:t>
             </a:r>
             <a:r>
-              <a:rPr lang="en-US" sz="1600" kern="1200" dirty="0"/>
+              <a:rPr lang="en-US" sz="1600" kern="1200" dirty="0">
+                <a:solidFill>
+                  <a:schemeClr val="tx1"/>
+                </a:solidFill>
+              </a:rPr>
               <a:t>.</a:t>
             </a:r>
           </a:p>
@@ -25429,13 +25473,13 @@
               <a:avLst/>
             </a:prstGeom>
             <a:blipFill>
-              <a:blip r:embed="rId6">
+              <a:blip>
                 <a:extLst>
                   <a:ext uri="{28A0092B-C50C-407E-A947-70E740481C1C}">
                     <a14:useLocalDpi xmlns:a14="http://schemas.microsoft.com/office/drawing/2010/main" val="0"/>
                   </a:ext>
                   <a:ext uri="{96DAC541-7B7A-43D3-8B79-37D633B846F1}">
-                    <asvg:svgBlip xmlns:asvg="http://schemas.microsoft.com/office/drawing/2016/SVG/main" r:embed="rId7"/>
+                    <asvg:svgBlip xmlns:asvg="http://schemas.microsoft.com/office/drawing/2016/SVG/main" r:embed="rId4"/>
                   </a:ext>
                 </a:extLst>
               </a:blip>
@@ -25608,18 +25652,34 @@
               <a:buNone/>
             </a:pPr>
             <a:r>
-              <a:rPr lang="en-US" sz="1600" b="1" kern="1200" dirty="0"/>
+              <a:rPr lang="en-US" sz="1600" b="1" kern="1200" dirty="0">
+                <a:solidFill>
+                  <a:schemeClr val="tx1"/>
+                </a:solidFill>
+              </a:rPr>
               <a:t>Sequential decision-making </a:t>
             </a:r>
             <a:r>
-              <a:rPr lang="en-US" sz="1600" kern="1200" dirty="0"/>
+              <a:rPr lang="en-US" sz="1600" kern="1200" dirty="0">
+                <a:solidFill>
+                  <a:schemeClr val="tx1"/>
+                </a:solidFill>
+              </a:rPr>
               <a:t>deals with decisions that influence each other and are made over time. This is a more complex decision problem and needs different methods like</a:t>
             </a:r>
             <a:br>
-              <a:rPr lang="en-US" sz="1600" kern="1200" dirty="0"/>
+              <a:rPr lang="en-US" sz="1600" kern="1200" dirty="0">
+                <a:solidFill>
+                  <a:schemeClr val="tx1"/>
+                </a:solidFill>
+              </a:rPr>
             </a:br>
             <a:r>
-              <a:rPr lang="en-US" sz="1600" b="1" kern="1200" dirty="0"/>
+              <a:rPr lang="en-US" sz="1600" b="1" kern="1200" dirty="0">
+                <a:solidFill>
+                  <a:schemeClr val="tx1"/>
+                </a:solidFill>
+              </a:rPr>
               <a:t>Markov Decision Processes.</a:t>
             </a:r>
           </a:p>
@@ -25635,257 +25695,6 @@
   <p:clrMapOvr>
     <a:masterClrMapping/>
   </p:clrMapOvr>
-  <p:timing>
-    <p:tnLst>
-      <p:par>
-        <p:cTn id="1" dur="indefinite" restart="never" nodeType="tmRoot">
-          <p:childTnLst>
-            <p:seq concurrent="1" nextAc="seek">
-              <p:cTn id="2" dur="indefinite" nodeType="mainSeq">
-                <p:childTnLst>
-                  <p:par>
-                    <p:cTn id="3" fill="hold">
-                      <p:stCondLst>
-                        <p:cond delay="indefinite"/>
-                      </p:stCondLst>
-                      <p:childTnLst>
-                        <p:par>
-                          <p:cTn id="4" fill="hold">
-                            <p:stCondLst>
-                              <p:cond delay="0"/>
-                            </p:stCondLst>
-                            <p:childTnLst>
-                              <p:par>
-                                <p:cTn id="5" presetID="1" presetClass="entr" presetSubtype="0" fill="hold" nodeType="clickEffect">
-                                  <p:stCondLst>
-                                    <p:cond delay="0"/>
-                                  </p:stCondLst>
-                                  <p:childTnLst>
-                                    <p:set>
-                                      <p:cBhvr>
-                                        <p:cTn id="6" dur="1" fill="hold">
-                                          <p:stCondLst>
-                                            <p:cond delay="0"/>
-                                          </p:stCondLst>
-                                        </p:cTn>
-                                        <p:tgtEl>
-                                          <p:spTgt spid="15"/>
-                                        </p:tgtEl>
-                                        <p:attrNameLst>
-                                          <p:attrName>style.visibility</p:attrName>
-                                        </p:attrNameLst>
-                                      </p:cBhvr>
-                                      <p:to>
-                                        <p:strVal val="visible"/>
-                                      </p:to>
-                                    </p:set>
-                                  </p:childTnLst>
-                                </p:cTn>
-                              </p:par>
-                              <p:par>
-                                <p:cTn id="7" presetID="1" presetClass="entr" presetSubtype="0" fill="hold" grpId="0" nodeType="withEffect">
-                                  <p:stCondLst>
-                                    <p:cond delay="0"/>
-                                  </p:stCondLst>
-                                  <p:childTnLst>
-                                    <p:set>
-                                      <p:cBhvr>
-                                        <p:cTn id="8" dur="1" fill="hold">
-                                          <p:stCondLst>
-                                            <p:cond delay="0"/>
-                                          </p:stCondLst>
-                                        </p:cTn>
-                                        <p:tgtEl>
-                                          <p:spTgt spid="6"/>
-                                        </p:tgtEl>
-                                        <p:attrNameLst>
-                                          <p:attrName>style.visibility</p:attrName>
-                                        </p:attrNameLst>
-                                      </p:cBhvr>
-                                      <p:to>
-                                        <p:strVal val="visible"/>
-                                      </p:to>
-                                    </p:set>
-                                  </p:childTnLst>
-                                </p:cTn>
-                              </p:par>
-                            </p:childTnLst>
-                          </p:cTn>
-                        </p:par>
-                      </p:childTnLst>
-                    </p:cTn>
-                  </p:par>
-                  <p:par>
-                    <p:cTn id="9" fill="hold">
-                      <p:stCondLst>
-                        <p:cond delay="indefinite"/>
-                      </p:stCondLst>
-                      <p:childTnLst>
-                        <p:par>
-                          <p:cTn id="10" fill="hold">
-                            <p:stCondLst>
-                              <p:cond delay="0"/>
-                            </p:stCondLst>
-                            <p:childTnLst>
-                              <p:par>
-                                <p:cTn id="11" presetID="1" presetClass="entr" presetSubtype="0" fill="hold" nodeType="clickEffect">
-                                  <p:stCondLst>
-                                    <p:cond delay="0"/>
-                                  </p:stCondLst>
-                                  <p:childTnLst>
-                                    <p:set>
-                                      <p:cBhvr>
-                                        <p:cTn id="12" dur="1" fill="hold">
-                                          <p:stCondLst>
-                                            <p:cond delay="0"/>
-                                          </p:stCondLst>
-                                        </p:cTn>
-                                        <p:tgtEl>
-                                          <p:spTgt spid="17"/>
-                                        </p:tgtEl>
-                                        <p:attrNameLst>
-                                          <p:attrName>style.visibility</p:attrName>
-                                        </p:attrNameLst>
-                                      </p:cBhvr>
-                                      <p:to>
-                                        <p:strVal val="visible"/>
-                                      </p:to>
-                                    </p:set>
-                                  </p:childTnLst>
-                                </p:cTn>
-                              </p:par>
-                              <p:par>
-                                <p:cTn id="13" presetID="1" presetClass="entr" presetSubtype="0" fill="hold" grpId="0" nodeType="withEffect">
-                                  <p:stCondLst>
-                                    <p:cond delay="0"/>
-                                  </p:stCondLst>
-                                  <p:childTnLst>
-                                    <p:set>
-                                      <p:cBhvr>
-                                        <p:cTn id="14" dur="1" fill="hold">
-                                          <p:stCondLst>
-                                            <p:cond delay="0"/>
-                                          </p:stCondLst>
-                                        </p:cTn>
-                                        <p:tgtEl>
-                                          <p:spTgt spid="9"/>
-                                        </p:tgtEl>
-                                        <p:attrNameLst>
-                                          <p:attrName>style.visibility</p:attrName>
-                                        </p:attrNameLst>
-                                      </p:cBhvr>
-                                      <p:to>
-                                        <p:strVal val="visible"/>
-                                      </p:to>
-                                    </p:set>
-                                  </p:childTnLst>
-                                </p:cTn>
-                              </p:par>
-                            </p:childTnLst>
-                          </p:cTn>
-                        </p:par>
-                      </p:childTnLst>
-                    </p:cTn>
-                  </p:par>
-                  <p:par>
-                    <p:cTn id="15" fill="hold">
-                      <p:stCondLst>
-                        <p:cond delay="indefinite"/>
-                      </p:stCondLst>
-                      <p:childTnLst>
-                        <p:par>
-                          <p:cTn id="16" fill="hold">
-                            <p:stCondLst>
-                              <p:cond delay="0"/>
-                            </p:stCondLst>
-                            <p:childTnLst>
-                              <p:par>
-                                <p:cTn id="17" presetID="1" presetClass="entr" presetSubtype="0" fill="hold" nodeType="clickEffect">
-                                  <p:stCondLst>
-                                    <p:cond delay="0"/>
-                                  </p:stCondLst>
-                                  <p:childTnLst>
-                                    <p:set>
-                                      <p:cBhvr>
-                                        <p:cTn id="18" dur="1" fill="hold">
-                                          <p:stCondLst>
-                                            <p:cond delay="0"/>
-                                          </p:stCondLst>
-                                        </p:cTn>
-                                        <p:tgtEl>
-                                          <p:spTgt spid="19"/>
-                                        </p:tgtEl>
-                                        <p:attrNameLst>
-                                          <p:attrName>style.visibility</p:attrName>
-                                        </p:attrNameLst>
-                                      </p:cBhvr>
-                                      <p:to>
-                                        <p:strVal val="visible"/>
-                                      </p:to>
-                                    </p:set>
-                                  </p:childTnLst>
-                                </p:cTn>
-                              </p:par>
-                              <p:par>
-                                <p:cTn id="19" presetID="1" presetClass="entr" presetSubtype="0" fill="hold" grpId="0" nodeType="withEffect">
-                                  <p:stCondLst>
-                                    <p:cond delay="0"/>
-                                  </p:stCondLst>
-                                  <p:childTnLst>
-                                    <p:set>
-                                      <p:cBhvr>
-                                        <p:cTn id="20" dur="1" fill="hold">
-                                          <p:stCondLst>
-                                            <p:cond delay="0"/>
-                                          </p:stCondLst>
-                                        </p:cTn>
-                                        <p:tgtEl>
-                                          <p:spTgt spid="13"/>
-                                        </p:tgtEl>
-                                        <p:attrNameLst>
-                                          <p:attrName>style.visibility</p:attrName>
-                                        </p:attrNameLst>
-                                      </p:cBhvr>
-                                      <p:to>
-                                        <p:strVal val="visible"/>
-                                      </p:to>
-                                    </p:set>
-                                  </p:childTnLst>
-                                </p:cTn>
-                              </p:par>
-                            </p:childTnLst>
-                          </p:cTn>
-                        </p:par>
-                      </p:childTnLst>
-                    </p:cTn>
-                  </p:par>
-                </p:childTnLst>
-              </p:cTn>
-              <p:prevCondLst>
-                <p:cond evt="onPrev" delay="0">
-                  <p:tgtEl>
-                    <p:sldTgt/>
-                  </p:tgtEl>
-                </p:cond>
-              </p:prevCondLst>
-              <p:nextCondLst>
-                <p:cond evt="onNext" delay="0">
-                  <p:tgtEl>
-                    <p:sldTgt/>
-                  </p:tgtEl>
-                </p:cond>
-              </p:nextCondLst>
-            </p:seq>
-          </p:childTnLst>
-        </p:cTn>
-      </p:par>
-    </p:tnLst>
-    <p:bldLst>
-      <p:bldP spid="6" grpId="0"/>
-      <p:bldP spid="9" grpId="0"/>
-      <p:bldP spid="13" grpId="0"/>
-    </p:bldLst>
-  </p:timing>
 </p:sld>
 </file>
 
@@ -26937,7 +26746,13 @@
                           <a:rPr lang="en-US" sz="1100" i="1" dirty="0" smtClean="0">
                             <a:latin typeface="Cambria Math" panose="02040503050406030204" pitchFamily="18" charset="0"/>
                           </a:rPr>
-                          <m:t>’)</m:t>
+                          <m:t>’</m:t>
+                        </m:r>
+                        <m:r>
+                          <a:rPr lang="en-US" sz="1100" i="1" dirty="0" smtClean="0">
+                            <a:latin typeface="Cambria Math" panose="02040503050406030204" pitchFamily="18" charset="0"/>
+                          </a:rPr>
+                          <m:t>)</m:t>
                         </m:r>
                       </m:oMath>
                     </m:oMathPara>
@@ -28127,7 +27942,13 @@
                               <a:rPr lang="en-US" sz="1100" b="0" i="1" dirty="0" smtClean="0">
                                 <a:latin typeface="Cambria Math" panose="02040503050406030204" pitchFamily="18" charset="0"/>
                               </a:rPr>
-                              <m:t>−1</m:t>
+                              <m:t>−</m:t>
+                            </m:r>
+                            <m:r>
+                              <a:rPr lang="en-US" sz="1100" b="0" i="1" dirty="0" smtClean="0">
+                                <a:latin typeface="Cambria Math" panose="02040503050406030204" pitchFamily="18" charset="0"/>
+                              </a:rPr>
+                              <m:t>1</m:t>
                             </m:r>
                           </m:sub>
                         </m:sSub>
@@ -28566,7 +28387,13 @@
                               <a:rPr lang="en-US" sz="1000" b="0" i="1" dirty="0" smtClean="0">
                                 <a:latin typeface="Cambria Math" panose="02040503050406030204" pitchFamily="18" charset="0"/>
                               </a:rPr>
-                              <m:t>−1</m:t>
+                              <m:t>−</m:t>
+                            </m:r>
+                            <m:r>
+                              <a:rPr lang="en-US" sz="1000" b="0" i="1" dirty="0" smtClean="0">
+                                <a:latin typeface="Cambria Math" panose="02040503050406030204" pitchFamily="18" charset="0"/>
+                              </a:rPr>
+                              <m:t>1</m:t>
                             </m:r>
                           </m:sub>
                         </m:sSub>
@@ -29581,13 +29408,13 @@
             <p:nvPr/>
           </p:nvPicPr>
           <p:blipFill>
-            <a:blip r:embed="rId3">
+            <a:blip>
               <a:extLst>
                 <a:ext uri="{28A0092B-C50C-407E-A947-70E740481C1C}">
                   <a14:useLocalDpi xmlns:a14="http://schemas.microsoft.com/office/drawing/2010/main" val="0"/>
                 </a:ext>
                 <a:ext uri="{96DAC541-7B7A-43D3-8B79-37D633B846F1}">
-                  <asvg:svgBlip xmlns:asvg="http://schemas.microsoft.com/office/drawing/2016/SVG/main" r:embed="rId4"/>
+                  <asvg:svgBlip xmlns:asvg="http://schemas.microsoft.com/office/drawing/2016/SVG/main" r:embed="rId3"/>
                 </a:ext>
               </a:extLst>
             </a:blip>
@@ -29620,13 +29447,13 @@
             <p:nvPr/>
           </p:nvPicPr>
           <p:blipFill>
-            <a:blip r:embed="rId3">
+            <a:blip>
               <a:extLst>
                 <a:ext uri="{28A0092B-C50C-407E-A947-70E740481C1C}">
                   <a14:useLocalDpi xmlns:a14="http://schemas.microsoft.com/office/drawing/2010/main" val="0"/>
                 </a:ext>
                 <a:ext uri="{96DAC541-7B7A-43D3-8B79-37D633B846F1}">
-                  <asvg:svgBlip xmlns:asvg="http://schemas.microsoft.com/office/drawing/2016/SVG/main" r:embed="rId4"/>
+                  <asvg:svgBlip xmlns:asvg="http://schemas.microsoft.com/office/drawing/2016/SVG/main" r:embed="rId3"/>
                 </a:ext>
               </a:extLst>
             </a:blip>
@@ -29659,13 +29486,13 @@
             <p:nvPr/>
           </p:nvPicPr>
           <p:blipFill>
-            <a:blip r:embed="rId3">
+            <a:blip>
               <a:extLst>
                 <a:ext uri="{28A0092B-C50C-407E-A947-70E740481C1C}">
                   <a14:useLocalDpi xmlns:a14="http://schemas.microsoft.com/office/drawing/2010/main" val="0"/>
                 </a:ext>
                 <a:ext uri="{96DAC541-7B7A-43D3-8B79-37D633B846F1}">
-                  <asvg:svgBlip xmlns:asvg="http://schemas.microsoft.com/office/drawing/2016/SVG/main" r:embed="rId4"/>
+                  <asvg:svgBlip xmlns:asvg="http://schemas.microsoft.com/office/drawing/2016/SVG/main" r:embed="rId3"/>
                 </a:ext>
               </a:extLst>
             </a:blip>
@@ -30564,8 +30391,8 @@
           </a:p>
         </p:txBody>
       </p:sp>
-      <mc:AlternateContent xmlns:mc="http://schemas.openxmlformats.org/markup-compatibility/2006" xmlns:a14="http://schemas.microsoft.com/office/drawing/2010/main">
-        <mc:Choice Requires="a14">
+      <mc:AlternateContent xmlns:mc="http://schemas.openxmlformats.org/markup-compatibility/2006">
+        <mc:Choice xmlns:a14="http://schemas.microsoft.com/office/drawing/2010/main" Requires="a14">
           <p:sp>
             <p:nvSpPr>
               <p:cNvPr id="3" name="Content Placeholder 2">
@@ -30590,7 +30417,7 @@
             </p:spPr>
             <p:txBody>
               <a:bodyPr anchor="t">
-                <a:normAutofit fontScale="77500" lnSpcReduction="20000"/>
+                <a:normAutofit fontScale="70000" lnSpcReduction="20000"/>
               </a:bodyPr>
               <a:lstStyle/>
               <a:p>
@@ -30652,15 +30479,12 @@
                       </a:rPr>
                       <m:t>𝑠</m:t>
                     </m:r>
-                    <m:r>
-                      <a:rPr lang="en-US" sz="1800" i="1">
-                        <a:latin typeface="Cambria Math" panose="02040503050406030204" pitchFamily="18" charset="0"/>
-                      </a:rPr>
-                      <m:t>.</m:t>
-                    </m:r>
                   </m:oMath>
                 </a14:m>
-                <a:endParaRPr lang="en-US" sz="1800" dirty="0"/>
+                <a:r>
+                  <a:rPr lang="en-US" sz="1800" dirty="0"/>
+                  <a:t> (implements partial observability).</a:t>
+                </a:r>
               </a:p>
               <a:p>
                 <a:r>
@@ -30788,7 +30612,7 @@
                 </a14:m>
                 <a:r>
                   <a:rPr lang="en-US" sz="1800" dirty="0"/>
-                  <a:t>. </a:t>
+                  <a:t> (implements a stochastic transition function). </a:t>
                 </a:r>
               </a:p>
               <a:p>
@@ -30882,7 +30706,33 @@
                 </a14:m>
                 <a:r>
                   <a:rPr lang="en-US" sz="1800" dirty="0"/>
-                  <a:t> to a future state s’ is</a:t>
+                  <a:t> to a future state </a:t>
+                </a:r>
+                <a14:m>
+                  <m:oMath xmlns:m="http://schemas.openxmlformats.org/officeDocument/2006/math">
+                    <m:r>
+                      <a:rPr lang="en-US" sz="1800" i="1" dirty="0" smtClean="0">
+                        <a:latin typeface="Cambria Math" panose="02040503050406030204" pitchFamily="18" charset="0"/>
+                      </a:rPr>
+                      <m:t>𝑠</m:t>
+                    </m:r>
+                    <m:r>
+                      <a:rPr lang="en-US" sz="1800" b="0" i="1" dirty="0" smtClean="0">
+                        <a:latin typeface="Cambria Math" panose="02040503050406030204" pitchFamily="18" charset="0"/>
+                      </a:rPr>
+                      <m:t>′</m:t>
+                    </m:r>
+                    <m:r>
+                      <a:rPr lang="en-US" sz="1800" i="1" dirty="0" smtClean="0">
+                        <a:latin typeface="Cambria Math" panose="02040503050406030204" pitchFamily="18" charset="0"/>
+                      </a:rPr>
+                      <m:t> </m:t>
+                    </m:r>
+                  </m:oMath>
+                </a14:m>
+                <a:r>
+                  <a:rPr lang="en-US" sz="1800" dirty="0"/>
+                  <a:t>is</a:t>
                 </a:r>
               </a:p>
               <a:p>
@@ -31423,7 +31273,7 @@
             </p:txBody>
           </p:sp>
         </mc:Choice>
-        <mc:Fallback xmlns="">
+        <mc:Fallback>
           <p:sp>
             <p:nvSpPr>
               <p:cNvPr id="3" name="Content Placeholder 2">
@@ -31448,7 +31298,7 @@
               <a:blipFill>
                 <a:blip r:embed="rId2"/>
                 <a:stretch>
-                  <a:fillRect l="-335" t="-2052" r="-335" b="-28358"/>
+                  <a:fillRect l="-223" t="-1679" b="-29664"/>
                 </a:stretch>
               </a:blipFill>
             </p:spPr>
@@ -31525,13 +31375,13 @@
               <p:nvPr/>
             </p:nvPicPr>
             <p:blipFill>
-              <a:blip r:embed="rId3">
+              <a:blip>
                 <a:extLst>
                   <a:ext uri="{28A0092B-C50C-407E-A947-70E740481C1C}">
                     <a14:useLocalDpi xmlns:a14="http://schemas.microsoft.com/office/drawing/2010/main" val="0"/>
                   </a:ext>
                   <a:ext uri="{96DAC541-7B7A-43D3-8B79-37D633B846F1}">
-                    <asvg:svgBlip xmlns:asvg="http://schemas.microsoft.com/office/drawing/2016/SVG/main" r:embed="rId4"/>
+                    <asvg:svgBlip xmlns:asvg="http://schemas.microsoft.com/office/drawing/2016/SVG/main" r:embed="rId3"/>
                   </a:ext>
                 </a:extLst>
               </a:blip>
@@ -31564,13 +31414,13 @@
               <p:nvPr/>
             </p:nvPicPr>
             <p:blipFill>
-              <a:blip r:embed="rId5">
+              <a:blip>
                 <a:extLst>
                   <a:ext uri="{28A0092B-C50C-407E-A947-70E740481C1C}">
                     <a14:useLocalDpi xmlns:a14="http://schemas.microsoft.com/office/drawing/2010/main" val="0"/>
                   </a:ext>
                   <a:ext uri="{96DAC541-7B7A-43D3-8B79-37D633B846F1}">
-                    <asvg:svgBlip xmlns:asvg="http://schemas.microsoft.com/office/drawing/2016/SVG/main" r:embed="rId6"/>
+                    <asvg:svgBlip xmlns:asvg="http://schemas.microsoft.com/office/drawing/2016/SVG/main" r:embed="rId4"/>
                   </a:ext>
                 </a:extLst>
               </a:blip>
@@ -31604,13 +31454,13 @@
             <p:nvPr/>
           </p:nvPicPr>
           <p:blipFill>
-            <a:blip r:embed="rId7">
+            <a:blip>
               <a:extLst>
                 <a:ext uri="{28A0092B-C50C-407E-A947-70E740481C1C}">
                   <a14:useLocalDpi xmlns:a14="http://schemas.microsoft.com/office/drawing/2010/main" val="0"/>
                 </a:ext>
                 <a:ext uri="{96DAC541-7B7A-43D3-8B79-37D633B846F1}">
-                  <asvg:svgBlip xmlns:asvg="http://schemas.microsoft.com/office/drawing/2016/SVG/main" r:embed="rId8"/>
+                  <asvg:svgBlip xmlns:asvg="http://schemas.microsoft.com/office/drawing/2016/SVG/main" r:embed="rId5"/>
                 </a:ext>
               </a:extLst>
             </a:blip>
@@ -31629,8 +31479,8 @@
           </p:spPr>
         </p:pic>
       </p:grpSp>
-      <mc:AlternateContent xmlns:mc="http://schemas.openxmlformats.org/markup-compatibility/2006" xmlns:a14="http://schemas.microsoft.com/office/drawing/2010/main">
-        <mc:Choice Requires="a14">
+      <mc:AlternateContent xmlns:mc="http://schemas.openxmlformats.org/markup-compatibility/2006">
+        <mc:Choice xmlns:a14="http://schemas.microsoft.com/office/drawing/2010/main" Requires="a14">
           <p:sp>
             <p:nvSpPr>
               <p:cNvPr id="4" name="TextBox 3">
@@ -31682,13 +31532,13 @@
                 </a:br>
                 <a:r>
                   <a:rPr lang="en-US" dirty="0"/>
-                  <a:t>will have later have</a:t>
+                  <a:t>will have later</a:t>
                 </a:r>
               </a:p>
             </p:txBody>
           </p:sp>
         </mc:Choice>
-        <mc:Fallback xmlns="">
+        <mc:Fallback>
           <p:sp>
             <p:nvSpPr>
               <p:cNvPr id="4" name="TextBox 3">
@@ -31712,7 +31562,7 @@
                 <a:avLst/>
               </a:prstGeom>
               <a:blipFill>
-                <a:blip r:embed="rId9"/>
+                <a:blip r:embed="rId6"/>
                 <a:stretch>
                   <a:fillRect l="-2222" t="-4717" r="-1667" b="-14151"/>
                 </a:stretch>
@@ -33430,13 +33280,13 @@
             <p:nvPr/>
           </p:nvPicPr>
           <p:blipFill>
-            <a:blip r:embed="rId3">
+            <a:blip>
               <a:extLst>
                 <a:ext uri="{28A0092B-C50C-407E-A947-70E740481C1C}">
                   <a14:useLocalDpi xmlns:a14="http://schemas.microsoft.com/office/drawing/2010/main" val="0"/>
                 </a:ext>
                 <a:ext uri="{96DAC541-7B7A-43D3-8B79-37D633B846F1}">
-                  <asvg:svgBlip xmlns:asvg="http://schemas.microsoft.com/office/drawing/2016/SVG/main" r:embed="rId4"/>
+                  <asvg:svgBlip xmlns:asvg="http://schemas.microsoft.com/office/drawing/2016/SVG/main" r:embed="rId3"/>
                 </a:ext>
               </a:extLst>
             </a:blip>
@@ -33469,13 +33319,13 @@
             <p:nvPr/>
           </p:nvPicPr>
           <p:blipFill>
-            <a:blip r:embed="rId5">
+            <a:blip>
               <a:extLst>
                 <a:ext uri="{28A0092B-C50C-407E-A947-70E740481C1C}">
                   <a14:useLocalDpi xmlns:a14="http://schemas.microsoft.com/office/drawing/2010/main" val="0"/>
                 </a:ext>
                 <a:ext uri="{96DAC541-7B7A-43D3-8B79-37D633B846F1}">
-                  <asvg:svgBlip xmlns:asvg="http://schemas.microsoft.com/office/drawing/2016/SVG/main" r:embed="rId6"/>
+                  <asvg:svgBlip xmlns:asvg="http://schemas.microsoft.com/office/drawing/2016/SVG/main" r:embed="rId4"/>
                 </a:ext>
               </a:extLst>
             </a:blip>
@@ -33555,13 +33405,13 @@
             <p:nvPr/>
           </p:nvPicPr>
           <p:blipFill>
-            <a:blip r:embed="rId7">
+            <a:blip>
               <a:extLst>
                 <a:ext uri="{28A0092B-C50C-407E-A947-70E740481C1C}">
                   <a14:useLocalDpi xmlns:a14="http://schemas.microsoft.com/office/drawing/2010/main" val="0"/>
                 </a:ext>
                 <a:ext uri="{96DAC541-7B7A-43D3-8B79-37D633B846F1}">
-                  <asvg:svgBlip xmlns:asvg="http://schemas.microsoft.com/office/drawing/2016/SVG/main" r:embed="rId8"/>
+                  <asvg:svgBlip xmlns:asvg="http://schemas.microsoft.com/office/drawing/2016/SVG/main" r:embed="rId5"/>
                 </a:ext>
               </a:extLst>
             </a:blip>
@@ -33594,13 +33444,13 @@
             <p:nvPr/>
           </p:nvPicPr>
           <p:blipFill>
-            <a:blip r:embed="rId7">
+            <a:blip>
               <a:extLst>
                 <a:ext uri="{28A0092B-C50C-407E-A947-70E740481C1C}">
                   <a14:useLocalDpi xmlns:a14="http://schemas.microsoft.com/office/drawing/2010/main" val="0"/>
                 </a:ext>
                 <a:ext uri="{96DAC541-7B7A-43D3-8B79-37D633B846F1}">
-                  <asvg:svgBlip xmlns:asvg="http://schemas.microsoft.com/office/drawing/2016/SVG/main" r:embed="rId8"/>
+                  <asvg:svgBlip xmlns:asvg="http://schemas.microsoft.com/office/drawing/2016/SVG/main" r:embed="rId5"/>
                 </a:ext>
               </a:extLst>
             </a:blip>
@@ -34580,7 +34430,21 @@
                 <a:latin typeface="Calibri"/>
                 <a:cs typeface="Calibri"/>
               </a:rPr>
-              <a:t>Bayesian network with additional nodes for utility and actions.</a:t>
+              <a:t>A </a:t>
+            </a:r>
+            <a:r>
+              <a:rPr lang="en-US" sz="1800" b="1" dirty="0">
+                <a:latin typeface="Calibri"/>
+                <a:cs typeface="Calibri"/>
+              </a:rPr>
+              <a:t>Bayesian network </a:t>
+            </a:r>
+            <a:r>
+              <a:rPr lang="en-US" sz="1800" dirty="0">
+                <a:latin typeface="Calibri"/>
+                <a:cs typeface="Calibri"/>
+              </a:rPr>
+              <a:t>with additional nodes for utility and actions.</a:t>
             </a:r>
           </a:p>
           <a:p>
@@ -34594,7 +34458,7 @@
                 <a:latin typeface="Calibri"/>
                 <a:cs typeface="Calibri"/>
               </a:rPr>
-              <a:t>Allows to specify the joint probability in a compact way using conditional independence.</a:t>
+              <a:t>Allows for specifying the joint probability in a compact way using conditional independence.</a:t>
             </a:r>
           </a:p>
           <a:p>
@@ -34608,7 +34472,7 @@
                 <a:latin typeface="Calibri"/>
                 <a:cs typeface="Calibri"/>
               </a:rPr>
-              <a:t> Calculate the expected utility for each possible action and select the best one.</a:t>
+              <a:t>Calculate the expected utility for each possible action and select the best one.</a:t>
             </a:r>
             <a:endParaRPr lang="en-US" sz="1000" dirty="0">
               <a:latin typeface="Calibri"/>
